--- a/presentations/PL_L03_TranslationStudio_Lesson.pptx
+++ b/presentations/PL_L03_TranslationStudio_Lesson.pptx
@@ -2,30 +2,30 @@
 <file path=ppt/presentation.xml><?xml version="1.0" encoding="utf-8"?>
 <p:presentation xmlns:p="http://schemas.openxmlformats.org/presentationml/2006/main">
   <p:sldMasterIdLst>
-    <p:sldMasterId xmlns:r="http://schemas.openxmlformats.org/officeDocument/2006/relationships" id="2147483648" r:id="R71f73a60bbae46b1"/>
+    <p:sldMasterId xmlns:r="http://schemas.openxmlformats.org/officeDocument/2006/relationships" id="2147483648" r:id="Rd736da63a4b04010"/>
   </p:sldMasterIdLst>
   <p:notesMasterIdLst>
-    <p:notesMasterId xmlns:r="http://schemas.openxmlformats.org/officeDocument/2006/relationships" r:id="Rb532737d3a084ec8"/>
+    <p:notesMasterId xmlns:r="http://schemas.openxmlformats.org/officeDocument/2006/relationships" r:id="R83555ba30a15486e"/>
   </p:notesMasterIdLst>
   <p:sldIdLst>
-    <p:sldId xmlns:r="http://schemas.openxmlformats.org/officeDocument/2006/relationships" id="256" r:id="R4ff4ce00f4f8481d"/>
-    <p:sldId xmlns:r="http://schemas.openxmlformats.org/officeDocument/2006/relationships" id="257" r:id="R84c409b28d444328"/>
-    <p:sldId xmlns:r="http://schemas.openxmlformats.org/officeDocument/2006/relationships" id="258" r:id="R4b22b92d412c4048"/>
-    <p:sldId xmlns:r="http://schemas.openxmlformats.org/officeDocument/2006/relationships" id="259" r:id="Re15420f65364470c"/>
-    <p:sldId xmlns:r="http://schemas.openxmlformats.org/officeDocument/2006/relationships" id="260" r:id="Rf21e82ee858c4e36"/>
-    <p:sldId xmlns:r="http://schemas.openxmlformats.org/officeDocument/2006/relationships" id="261" r:id="Re33a42b27d0847c0"/>
-    <p:sldId xmlns:r="http://schemas.openxmlformats.org/officeDocument/2006/relationships" id="262" r:id="R0d25695a01234150"/>
-    <p:sldId xmlns:r="http://schemas.openxmlformats.org/officeDocument/2006/relationships" id="263" r:id="R5662006f23f44d1e"/>
-    <p:sldId xmlns:r="http://schemas.openxmlformats.org/officeDocument/2006/relationships" id="264" r:id="R781febe6e23549ce"/>
-    <p:sldId xmlns:r="http://schemas.openxmlformats.org/officeDocument/2006/relationships" id="265" r:id="Ref742ffac3b847d2"/>
-    <p:sldId xmlns:r="http://schemas.openxmlformats.org/officeDocument/2006/relationships" id="266" r:id="Rbea5e1ec524d42b5"/>
-    <p:sldId xmlns:r="http://schemas.openxmlformats.org/officeDocument/2006/relationships" id="267" r:id="R4077029771e3474f"/>
-    <p:sldId xmlns:r="http://schemas.openxmlformats.org/officeDocument/2006/relationships" id="268" r:id="R56eabd976b2d432b"/>
-    <p:sldId xmlns:r="http://schemas.openxmlformats.org/officeDocument/2006/relationships" id="269" r:id="R5402f628c4c24331"/>
-    <p:sldId xmlns:r="http://schemas.openxmlformats.org/officeDocument/2006/relationships" id="270" r:id="R63e8addb47b24eab"/>
-    <p:sldId xmlns:r="http://schemas.openxmlformats.org/officeDocument/2006/relationships" id="271" r:id="R30568a653b0344f0"/>
-    <p:sldId xmlns:r="http://schemas.openxmlformats.org/officeDocument/2006/relationships" id="272" r:id="R2d27a2b3ee1e4b57"/>
-    <p:sldId xmlns:r="http://schemas.openxmlformats.org/officeDocument/2006/relationships" id="273" r:id="R2221b30348cf4433"/>
+    <p:sldId xmlns:r="http://schemas.openxmlformats.org/officeDocument/2006/relationships" id="256" r:id="R0f602e5bf5584428"/>
+    <p:sldId xmlns:r="http://schemas.openxmlformats.org/officeDocument/2006/relationships" id="257" r:id="Rccd70e72eb8445cd"/>
+    <p:sldId xmlns:r="http://schemas.openxmlformats.org/officeDocument/2006/relationships" id="258" r:id="Rbcbdc32cbba8451a"/>
+    <p:sldId xmlns:r="http://schemas.openxmlformats.org/officeDocument/2006/relationships" id="259" r:id="R13ccc4660ee6407c"/>
+    <p:sldId xmlns:r="http://schemas.openxmlformats.org/officeDocument/2006/relationships" id="260" r:id="Re53ad5eec79f481a"/>
+    <p:sldId xmlns:r="http://schemas.openxmlformats.org/officeDocument/2006/relationships" id="261" r:id="R337fd68ea76c4dd4"/>
+    <p:sldId xmlns:r="http://schemas.openxmlformats.org/officeDocument/2006/relationships" id="262" r:id="R012e54eef8b74b6a"/>
+    <p:sldId xmlns:r="http://schemas.openxmlformats.org/officeDocument/2006/relationships" id="263" r:id="R0cc3ec3179254575"/>
+    <p:sldId xmlns:r="http://schemas.openxmlformats.org/officeDocument/2006/relationships" id="264" r:id="R1664061e8a484740"/>
+    <p:sldId xmlns:r="http://schemas.openxmlformats.org/officeDocument/2006/relationships" id="265" r:id="R8c9434db80f44d5f"/>
+    <p:sldId xmlns:r="http://schemas.openxmlformats.org/officeDocument/2006/relationships" id="266" r:id="R62d652cf17764daa"/>
+    <p:sldId xmlns:r="http://schemas.openxmlformats.org/officeDocument/2006/relationships" id="267" r:id="R925bb4eea0ec4eb4"/>
+    <p:sldId xmlns:r="http://schemas.openxmlformats.org/officeDocument/2006/relationships" id="268" r:id="Rafaad61bb2e34849"/>
+    <p:sldId xmlns:r="http://schemas.openxmlformats.org/officeDocument/2006/relationships" id="269" r:id="R7f257cdac9174c35"/>
+    <p:sldId xmlns:r="http://schemas.openxmlformats.org/officeDocument/2006/relationships" id="270" r:id="Rb30a80821ed24418"/>
+    <p:sldId xmlns:r="http://schemas.openxmlformats.org/officeDocument/2006/relationships" id="271" r:id="Rf9c07915d254499c"/>
+    <p:sldId xmlns:r="http://schemas.openxmlformats.org/officeDocument/2006/relationships" id="272" r:id="R04a1837c4f814bc2"/>
+    <p:sldId xmlns:r="http://schemas.openxmlformats.org/officeDocument/2006/relationships" id="273" r:id="R1275a05613fa402c"/>
   </p:sldIdLst>
   <p:sldSz cx="12192000" cy="6858000"/>
   <p:notesSz cx="6858000" cy="9144000"/>
@@ -459,7 +459,7 @@
           <a:lstStyle xmlns:a="http://schemas.openxmlformats.org/drawingml/2006/main"/>
           <a:p xmlns:a="http://schemas.openxmlformats.org/drawingml/2006/main">
             <a:r>
-              <a:t>Revise360 original lesson content. Teaching examples support OCR J277 Topic 2.5. The low-level instruction model is explanatory enrichment, not an additional required instruction set.</a:t>
+              <a:t>Revise360 original lesson content. Teaching examples support OCR J277 Topic 2.5. Scope: OCR J277 specification v3.1, May 2026, printed page 21, sections 2.5.1 and 2.5.2. https://www.ocr.org.uk/images/558027-specification-gcse-computer-science-j277.pdf</a:t>
             </a:r>
           </a:p>
         </p:txBody>
@@ -529,7 +529,7 @@
           <a:lstStyle xmlns:a="http://schemas.openxmlformats.org/drawingml/2006/main"/>
           <a:p xmlns:a="http://schemas.openxmlformats.org/drawingml/2006/main">
             <a:r>
-              <a:t>Revise360 original lesson content. Teaching examples support OCR J277 Topic 2.5. The low-level instruction model is explanatory enrichment, not an additional required instruction set.</a:t>
+              <a:t>Revise360 original lesson content. Teaching examples support OCR J277 Topic 2.5. Scope: OCR J277 specification v3.1, May 2026, printed page 21, sections 2.5.1 and 2.5.2. https://www.ocr.org.uk/images/558027-specification-gcse-computer-science-j277.pdf</a:t>
             </a:r>
           </a:p>
         </p:txBody>
@@ -599,7 +599,7 @@
           <a:lstStyle xmlns:a="http://schemas.openxmlformats.org/drawingml/2006/main"/>
           <a:p xmlns:a="http://schemas.openxmlformats.org/drawingml/2006/main">
             <a:r>
-              <a:t>Revise360 original lesson content. Teaching examples support OCR J277 Topic 2.5. The low-level instruction model is explanatory enrichment, not an additional required instruction set.</a:t>
+              <a:t>Revise360 original lesson content. Teaching examples support OCR J277 Topic 2.5. Scope: OCR J277 specification v3.1, May 2026, printed page 21, sections 2.5.1 and 2.5.2. https://www.ocr.org.uk/images/558027-specification-gcse-computer-science-j277.pdf</a:t>
             </a:r>
           </a:p>
         </p:txBody>
@@ -669,7 +669,7 @@
           <a:lstStyle xmlns:a="http://schemas.openxmlformats.org/drawingml/2006/main"/>
           <a:p xmlns:a="http://schemas.openxmlformats.org/drawingml/2006/main">
             <a:r>
-              <a:t>Revise360 original lesson content. Teaching examples support OCR J277 Topic 2.5. The low-level instruction model is explanatory enrichment, not an additional required instruction set.</a:t>
+              <a:t>Revise360 original lesson content. Teaching examples support OCR J277 Topic 2.5. Scope: OCR J277 specification v3.1, May 2026, printed page 21, sections 2.5.1 and 2.5.2. https://www.ocr.org.uk/images/558027-specification-gcse-computer-science-j277.pdf</a:t>
             </a:r>
           </a:p>
         </p:txBody>
@@ -739,7 +739,7 @@
           <a:lstStyle xmlns:a="http://schemas.openxmlformats.org/drawingml/2006/main"/>
           <a:p xmlns:a="http://schemas.openxmlformats.org/drawingml/2006/main">
             <a:r>
-              <a:t>Revise360 original lesson content. Teaching examples support OCR J277 Topic 2.5. The low-level instruction model is explanatory enrichment, not an additional required instruction set.</a:t>
+              <a:t>Revise360 original lesson content. Teaching examples support OCR J277 Topic 2.5. Scope: OCR J277 specification v3.1, May 2026, printed page 21, sections 2.5.1 and 2.5.2. https://www.ocr.org.uk/images/558027-specification-gcse-computer-science-j277.pdf</a:t>
             </a:r>
           </a:p>
         </p:txBody>
@@ -809,7 +809,7 @@
           <a:lstStyle xmlns:a="http://schemas.openxmlformats.org/drawingml/2006/main"/>
           <a:p xmlns:a="http://schemas.openxmlformats.org/drawingml/2006/main">
             <a:r>
-              <a:t>Revise360 original lesson content. Teaching examples support OCR J277 Topic 2.5. The low-level instruction model is explanatory enrichment, not an additional required instruction set.</a:t>
+              <a:t>Revise360 original lesson content. Teaching examples support OCR J277 Topic 2.5. Scope: OCR J277 specification v3.1, May 2026, printed page 21, sections 2.5.1 and 2.5.2. https://www.ocr.org.uk/images/558027-specification-gcse-computer-science-j277.pdf</a:t>
             </a:r>
           </a:p>
         </p:txBody>
@@ -879,7 +879,7 @@
           <a:lstStyle xmlns:a="http://schemas.openxmlformats.org/drawingml/2006/main"/>
           <a:p xmlns:a="http://schemas.openxmlformats.org/drawingml/2006/main">
             <a:r>
-              <a:t>Revise360 original lesson content. Teaching examples support OCR J277 Topic 2.5. The low-level instruction model is explanatory enrichment, not an additional required instruction set.</a:t>
+              <a:t>Revise360 original lesson content. Teaching examples support OCR J277 Topic 2.5. Scope: OCR J277 specification v3.1, May 2026, printed page 21, sections 2.5.1 and 2.5.2. https://www.ocr.org.uk/images/558027-specification-gcse-computer-science-j277.pdf</a:t>
             </a:r>
           </a:p>
         </p:txBody>
@@ -949,7 +949,7 @@
           <a:lstStyle xmlns:a="http://schemas.openxmlformats.org/drawingml/2006/main"/>
           <a:p xmlns:a="http://schemas.openxmlformats.org/drawingml/2006/main">
             <a:r>
-              <a:t>Revise360 original lesson content. Teaching examples support OCR J277 Topic 2.5. The low-level instruction model is explanatory enrichment, not an additional required instruction set.</a:t>
+              <a:t>Revise360 original lesson content. Teaching examples support OCR J277 Topic 2.5. Scope: OCR J277 specification v3.1, May 2026, printed page 21, sections 2.5.1 and 2.5.2. https://www.ocr.org.uk/images/558027-specification-gcse-computer-science-j277.pdf</a:t>
             </a:r>
           </a:p>
         </p:txBody>
@@ -1019,7 +1019,7 @@
           <a:lstStyle xmlns:a="http://schemas.openxmlformats.org/drawingml/2006/main"/>
           <a:p xmlns:a="http://schemas.openxmlformats.org/drawingml/2006/main">
             <a:r>
-              <a:t>Revise360 original lesson content. Teaching examples support OCR J277 Topic 2.5. The low-level instruction model is explanatory enrichment, not an additional required instruction set.</a:t>
+              <a:t>Revise360 original lesson content. Teaching examples support OCR J277 Topic 2.5. Scope: OCR J277 specification v3.1, May 2026, printed page 21, sections 2.5.1 and 2.5.2. https://www.ocr.org.uk/images/558027-specification-gcse-computer-science-j277.pdf</a:t>
             </a:r>
           </a:p>
         </p:txBody>
@@ -1089,7 +1089,7 @@
           <a:lstStyle xmlns:a="http://schemas.openxmlformats.org/drawingml/2006/main"/>
           <a:p xmlns:a="http://schemas.openxmlformats.org/drawingml/2006/main">
             <a:r>
-              <a:t>Revise360 original lesson content. Teaching examples support OCR J277 Topic 2.5. The low-level instruction model is explanatory enrichment, not an additional required instruction set.</a:t>
+              <a:t>Revise360 original lesson content. Teaching examples support OCR J277 Topic 2.5. Scope: OCR J277 specification v3.1, May 2026, printed page 21, sections 2.5.1 and 2.5.2. https://www.ocr.org.uk/images/558027-specification-gcse-computer-science-j277.pdf</a:t>
             </a:r>
           </a:p>
         </p:txBody>
@@ -1159,7 +1159,7 @@
           <a:lstStyle xmlns:a="http://schemas.openxmlformats.org/drawingml/2006/main"/>
           <a:p xmlns:a="http://schemas.openxmlformats.org/drawingml/2006/main">
             <a:r>
-              <a:t>Revise360 original lesson content. Teaching examples support OCR J277 Topic 2.5. The low-level instruction model is explanatory enrichment, not an additional required instruction set.</a:t>
+              <a:t>Revise360 original lesson content. Teaching examples support OCR J277 Topic 2.5. Scope: OCR J277 specification v3.1, May 2026, printed page 21, sections 2.5.1 and 2.5.2. https://www.ocr.org.uk/images/558027-specification-gcse-computer-science-j277.pdf</a:t>
             </a:r>
           </a:p>
         </p:txBody>
@@ -1229,7 +1229,7 @@
           <a:lstStyle xmlns:a="http://schemas.openxmlformats.org/drawingml/2006/main"/>
           <a:p xmlns:a="http://schemas.openxmlformats.org/drawingml/2006/main">
             <a:r>
-              <a:t>Revise360 original lesson content. Teaching examples support OCR J277 Topic 2.5. The low-level instruction model is explanatory enrichment, not an additional required instruction set.</a:t>
+              <a:t>Revise360 original lesson content. Teaching examples support OCR J277 Topic 2.5. Scope: OCR J277 specification v3.1, May 2026, printed page 21, sections 2.5.1 and 2.5.2. https://www.ocr.org.uk/images/558027-specification-gcse-computer-science-j277.pdf</a:t>
             </a:r>
           </a:p>
         </p:txBody>
@@ -1299,7 +1299,7 @@
           <a:lstStyle xmlns:a="http://schemas.openxmlformats.org/drawingml/2006/main"/>
           <a:p xmlns:a="http://schemas.openxmlformats.org/drawingml/2006/main">
             <a:r>
-              <a:t>Revise360 original lesson content. Teaching examples support OCR J277 Topic 2.5. The low-level instruction model is explanatory enrichment, not an additional required instruction set.</a:t>
+              <a:t>Revise360 original lesson content. Teaching examples support OCR J277 Topic 2.5. Scope: OCR J277 specification v3.1, May 2026, printed page 21, sections 2.5.1 and 2.5.2. https://www.ocr.org.uk/images/558027-specification-gcse-computer-science-j277.pdf</a:t>
             </a:r>
           </a:p>
         </p:txBody>
@@ -1369,7 +1369,7 @@
           <a:lstStyle xmlns:a="http://schemas.openxmlformats.org/drawingml/2006/main"/>
           <a:p xmlns:a="http://schemas.openxmlformats.org/drawingml/2006/main">
             <a:r>
-              <a:t>Revise360 original lesson content. Teaching examples support OCR J277 Topic 2.5. The low-level instruction model is explanatory enrichment, not an additional required instruction set.</a:t>
+              <a:t>Revise360 original lesson content. Teaching examples support OCR J277 Topic 2.5. Scope: OCR J277 specification v3.1, May 2026, printed page 21, sections 2.5.1 and 2.5.2. https://www.ocr.org.uk/images/558027-specification-gcse-computer-science-j277.pdf</a:t>
             </a:r>
           </a:p>
         </p:txBody>
@@ -1439,7 +1439,7 @@
           <a:lstStyle xmlns:a="http://schemas.openxmlformats.org/drawingml/2006/main"/>
           <a:p xmlns:a="http://schemas.openxmlformats.org/drawingml/2006/main">
             <a:r>
-              <a:t>Revise360 original lesson content. Teaching examples support OCR J277 Topic 2.5. The low-level instruction model is explanatory enrichment, not an additional required instruction set.</a:t>
+              <a:t>Revise360 original lesson content. Teaching examples support OCR J277 Topic 2.5. Scope: OCR J277 specification v3.1, May 2026, printed page 21, sections 2.5.1 and 2.5.2. https://www.ocr.org.uk/images/558027-specification-gcse-computer-science-j277.pdf</a:t>
             </a:r>
           </a:p>
         </p:txBody>
@@ -1509,7 +1509,7 @@
           <a:lstStyle xmlns:a="http://schemas.openxmlformats.org/drawingml/2006/main"/>
           <a:p xmlns:a="http://schemas.openxmlformats.org/drawingml/2006/main">
             <a:r>
-              <a:t>Revise360 original lesson content. Teaching examples support OCR J277 Topic 2.5. The low-level instruction model is explanatory enrichment, not an additional required instruction set.</a:t>
+              <a:t>Revise360 original lesson content. Teaching examples support OCR J277 Topic 2.5. Scope: OCR J277 specification v3.1, May 2026, printed page 21, sections 2.5.1 and 2.5.2. https://www.ocr.org.uk/images/558027-specification-gcse-computer-science-j277.pdf</a:t>
             </a:r>
           </a:p>
         </p:txBody>
@@ -1579,7 +1579,7 @@
           <a:lstStyle xmlns:a="http://schemas.openxmlformats.org/drawingml/2006/main"/>
           <a:p xmlns:a="http://schemas.openxmlformats.org/drawingml/2006/main">
             <a:r>
-              <a:t>Revise360 original lesson content. Teaching examples support OCR J277 Topic 2.5. The low-level instruction model is explanatory enrichment, not an additional required instruction set.</a:t>
+              <a:t>Revise360 original lesson content. Teaching examples support OCR J277 Topic 2.5. Scope: OCR J277 specification v3.1, May 2026, printed page 21, sections 2.5.1 and 2.5.2. https://www.ocr.org.uk/images/558027-specification-gcse-computer-science-j277.pdf</a:t>
             </a:r>
           </a:p>
         </p:txBody>
@@ -1649,7 +1649,7 @@
           <a:lstStyle xmlns:a="http://schemas.openxmlformats.org/drawingml/2006/main"/>
           <a:p xmlns:a="http://schemas.openxmlformats.org/drawingml/2006/main">
             <a:r>
-              <a:t>Revise360 original lesson content. Teaching examples support OCR J277 Topic 2.5. The low-level instruction model is explanatory enrichment, not an additional required instruction set.</a:t>
+              <a:t>Revise360 original lesson content. Teaching examples support OCR J277 Topic 2.5. Scope: OCR J277 specification v3.1, May 2026, printed page 21, sections 2.5.1 and 2.5.2. https://www.ocr.org.uk/images/558027-specification-gcse-computer-science-j277.pdf</a:t>
             </a:r>
           </a:p>
         </p:txBody>
@@ -1717,7 +1717,7 @@
   </p:cSld>
   <p:clrMap bg1="lt1" tx1="dk1" bg2="lt2" tx2="dk2" accent1="accent1" accent2="accent2" accent3="accent3" accent4="accent4" accent5="accent5" accent6="accent6" hlink="hlink" folHlink="folHlink"/>
   <p:sldLayoutIdLst>
-    <p:sldLayoutId xmlns:r="http://schemas.openxmlformats.org/officeDocument/2006/relationships" id="2147483649" r:id="R601bf337934b4c5a"/>
+    <p:sldLayoutId xmlns:r="http://schemas.openxmlformats.org/officeDocument/2006/relationships" id="2147483649" r:id="Rf87e5df6cadb4bc4"/>
   </p:sldLayoutIdLst>
   <p:txStyles>
     <p:titleStyle>
@@ -2418,7 +2418,7 @@
           <p:nvPr/>
         </p:nvPicPr>
         <p:blipFill>
-          <a:blip xmlns:r="http://schemas.openxmlformats.org/officeDocument/2006/relationships" xmlns:a="http://schemas.openxmlformats.org/drawingml/2006/main" r:embed="Rc2b64a43521947b5"/>
+          <a:blip xmlns:r="http://schemas.openxmlformats.org/officeDocument/2006/relationships" xmlns:a="http://schemas.openxmlformats.org/drawingml/2006/main" r:embed="Rd8968b7eeaf847ab"/>
           <a:stretch xmlns:a="http://schemas.openxmlformats.org/drawingml/2006/main"/>
         </p:blipFill>
         <p:spPr>
@@ -2672,7 +2672,7 @@
           <p:nvPr/>
         </p:nvPicPr>
         <p:blipFill>
-          <a:blip xmlns:r="http://schemas.openxmlformats.org/officeDocument/2006/relationships" xmlns:a="http://schemas.openxmlformats.org/drawingml/2006/main" r:embed="R831035e37ddc46d2"/>
+          <a:blip xmlns:r="http://schemas.openxmlformats.org/officeDocument/2006/relationships" xmlns:a="http://schemas.openxmlformats.org/drawingml/2006/main" r:embed="R9bf62c733c2a4531"/>
           <a:stretch xmlns:a="http://schemas.openxmlformats.org/drawingml/2006/main"/>
         </p:blipFill>
         <p:spPr>
@@ -2869,7 +2869,7 @@
           <p:nvPr/>
         </p:nvPicPr>
         <p:blipFill>
-          <a:blip xmlns:r="http://schemas.openxmlformats.org/officeDocument/2006/relationships" xmlns:a="http://schemas.openxmlformats.org/drawingml/2006/main" r:embed="Rede0326540af4a27"/>
+          <a:blip xmlns:r="http://schemas.openxmlformats.org/officeDocument/2006/relationships" xmlns:a="http://schemas.openxmlformats.org/drawingml/2006/main" r:embed="Rca5927ffeea24152"/>
           <a:stretch xmlns:a="http://schemas.openxmlformats.org/drawingml/2006/main"/>
         </p:blipFill>
         <p:spPr>
@@ -3414,7 +3414,7 @@
           <p:nvPr/>
         </p:nvPicPr>
         <p:blipFill>
-          <a:blip xmlns:r="http://schemas.openxmlformats.org/officeDocument/2006/relationships" xmlns:a="http://schemas.openxmlformats.org/drawingml/2006/main" r:embed="R14b61a1d6ce34e39"/>
+          <a:blip xmlns:r="http://schemas.openxmlformats.org/officeDocument/2006/relationships" xmlns:a="http://schemas.openxmlformats.org/drawingml/2006/main" r:embed="Rb130c5a29850419d"/>
           <a:stretch xmlns:a="http://schemas.openxmlformats.org/drawingml/2006/main"/>
         </p:blipFill>
         <p:spPr>
@@ -4075,7 +4075,7 @@
           <p:nvPr/>
         </p:nvPicPr>
         <p:blipFill>
-          <a:blip xmlns:r="http://schemas.openxmlformats.org/officeDocument/2006/relationships" xmlns:a="http://schemas.openxmlformats.org/drawingml/2006/main" r:embed="R6395d43802ad46b5"/>
+          <a:blip xmlns:r="http://schemas.openxmlformats.org/officeDocument/2006/relationships" xmlns:a="http://schemas.openxmlformats.org/drawingml/2006/main" r:embed="Rbb55c3f0e5af4cf4"/>
           <a:stretch xmlns:a="http://schemas.openxmlformats.org/drawingml/2006/main"/>
         </p:blipFill>
         <p:spPr>
@@ -4257,7 +4257,7 @@
                 <a:ea typeface="DejaVu Sans"/>
                 <a:cs typeface="DejaVu Sans"/>
               </a:rPr>
-              <a:t>4  Errors at different stages</a:t>
+              <a:t>4  Error reporting</a:t>
             </a:r>
           </a:p>
         </p:txBody>
@@ -4315,7 +4315,7 @@
                 <a:ea typeface="DejaVu Sans"/>
                 <a:cs typeface="DejaVu Sans"/>
               </a:rPr>
-              <a:t>No. The code can obey syntax rules while implementing the wrong calculation. Test its outputs against expected results.</a:t>
+              <a:t>It stops at the error it encounters and reports it, helping the programmer identify the source instruction to correct.</a:t>
             </a:r>
           </a:p>
         </p:txBody>
@@ -4373,7 +4373,7 @@
                 <a:ea typeface="DejaVu Sans"/>
                 <a:cs typeface="DejaVu Sans"/>
               </a:rPr>
-              <a:t>5  Time and distribution</a:t>
+              <a:t>5  Running and distributing</a:t>
             </a:r>
           </a:p>
         </p:txBody>
@@ -4431,7 +4431,7 @@
                 <a:ea typeface="DejaVu Sans"/>
                 <a:cs typeface="DejaVu Sans"/>
               </a:rPr>
-              <a:t>Usually no. They need a compatible system and any required runtime libraries, but not the original compiler.</a:t>
+              <a:t>Its source has already been translated, so execution does not repeatedly include source translation.</a:t>
             </a:r>
           </a:p>
         </p:txBody>
@@ -4736,7 +4736,7 @@
           <p:nvPr/>
         </p:nvPicPr>
         <p:blipFill>
-          <a:blip xmlns:r="http://schemas.openxmlformats.org/officeDocument/2006/relationships" xmlns:a="http://schemas.openxmlformats.org/drawingml/2006/main" r:embed="Rfd7b4d16b77c4613"/>
+          <a:blip xmlns:r="http://schemas.openxmlformats.org/officeDocument/2006/relationships" xmlns:a="http://schemas.openxmlformats.org/drawingml/2006/main" r:embed="Re3789097d6d64309"/>
           <a:stretch xmlns:a="http://schemas.openxmlformats.org/drawingml/2006/main"/>
         </p:blipFill>
         <p:spPr>
@@ -4976,7 +4976,7 @@
                 <a:ea typeface="DejaVu Sans"/>
                 <a:cs typeface="DejaVu Sans"/>
               </a:rPr>
-              <a:t>Quickly retest a changed source statement: Interpretation supports short edit-and-run cycles. Run a finished program many times: A compiled build avoids repeating source translation. A translated program gives the wrong answer: Logic still needs testing</a:t>
+              <a:t>Quick feedback while changing source: Interpreter stops and reports an error. Run a finished program repeatedly: Compiler avoids repeating source translation. Supply a program without its source: Compiler can produce an executable</a:t>
             </a:r>
           </a:p>
           <a:p xmlns:a="http://schemas.openxmlformats.org/drawingml/2006/main">
@@ -5024,7 +5024,7 @@
                 <a:ea typeface="DejaVu Sans"/>
                 <a:cs typeface="DejaVu Sans"/>
               </a:rPr>
-              <a:t>Translation does not replace testing. A compiled program may need a compatible runtime library</a:t>
+              <a:t>Compilation takes place before the resulting program runs. An interpreter translates during each run</a:t>
             </a:r>
           </a:p>
         </p:txBody>
@@ -5793,7 +5793,7 @@
           <p:nvPr/>
         </p:nvPicPr>
         <p:blipFill>
-          <a:blip xmlns:r="http://schemas.openxmlformats.org/officeDocument/2006/relationships" xmlns:a="http://schemas.openxmlformats.org/drawingml/2006/main" r:embed="Rcd6143fb035b4499"/>
+          <a:blip xmlns:r="http://schemas.openxmlformats.org/officeDocument/2006/relationships" xmlns:a="http://schemas.openxmlformats.org/drawingml/2006/main" r:embed="R945bd6e4815a42cd"/>
           <a:stretch xmlns:a="http://schemas.openxmlformats.org/drawingml/2006/main"/>
         </p:blipFill>
         <p:spPr>
@@ -6338,7 +6338,7 @@
           <p:nvPr/>
         </p:nvPicPr>
         <p:blipFill>
-          <a:blip xmlns:r="http://schemas.openxmlformats.org/officeDocument/2006/relationships" xmlns:a="http://schemas.openxmlformats.org/drawingml/2006/main" r:embed="R0d73c99de09d412e"/>
+          <a:blip xmlns:r="http://schemas.openxmlformats.org/officeDocument/2006/relationships" xmlns:a="http://schemas.openxmlformats.org/drawingml/2006/main" r:embed="R5e8e9d57e85d40ba"/>
           <a:stretch xmlns:a="http://schemas.openxmlformats.org/drawingml/2006/main"/>
         </p:blipFill>
         <p:spPr>
@@ -6578,7 +6578,7 @@
                 <a:ea typeface="DejaVu Sans"/>
                 <a:cs typeface="DejaVu Sans"/>
               </a:rPr>
-              <a:t>A program compiles but calculates tax incorrectly. Explain why testing is still needed. [2]</a:t>
+              <a:t>Explain one benefit and one drawback of using a compiler. [4]</a:t>
             </a:r>
           </a:p>
         </p:txBody>
@@ -6825,7 +6825,7 @@
           <p:nvPr/>
         </p:nvPicPr>
         <p:blipFill>
-          <a:blip xmlns:r="http://schemas.openxmlformats.org/officeDocument/2006/relationships" xmlns:a="http://schemas.openxmlformats.org/drawingml/2006/main" r:embed="R785467e1e47248e4"/>
+          <a:blip xmlns:r="http://schemas.openxmlformats.org/officeDocument/2006/relationships" xmlns:a="http://schemas.openxmlformats.org/drawingml/2006/main" r:embed="R52f7f96f973a46a8"/>
           <a:stretch xmlns:a="http://schemas.openxmlformats.org/drawingml/2006/main"/>
         </p:blipFill>
         <p:spPr>
@@ -7254,7 +7254,7 @@
           <p:nvPr/>
         </p:nvPicPr>
         <p:blipFill>
-          <a:blip xmlns:r="http://schemas.openxmlformats.org/officeDocument/2006/relationships" xmlns:a="http://schemas.openxmlformats.org/drawingml/2006/main" r:embed="R9d733dd0de8c4afc"/>
+          <a:blip xmlns:r="http://schemas.openxmlformats.org/officeDocument/2006/relationships" xmlns:a="http://schemas.openxmlformats.org/drawingml/2006/main" r:embed="Rae42cba8817e4f34"/>
           <a:stretch xmlns:a="http://schemas.openxmlformats.org/drawingml/2006/main"/>
         </p:blipFill>
         <p:spPr>
@@ -7494,7 +7494,7 @@
                 <a:ea typeface="DejaVu Sans"/>
                 <a:cs typeface="DejaVu Sans"/>
               </a:rPr>
-              <a:t>The program may contain a logic error despite valid syntax.</a:t>
+              <a:t>The translated program can run without repeating source translation.</a:t>
             </a:r>
           </a:p>
         </p:txBody>
@@ -7610,7 +7610,7 @@
                 <a:ea typeface="DejaVu Sans"/>
                 <a:cs typeface="DejaVu Sans"/>
               </a:rPr>
-              <a:t>Testing compares actual results with expected results to identify the fault.</a:t>
+              <a:t>This can make execution faster than interpretation.</a:t>
             </a:r>
           </a:p>
         </p:txBody>
@@ -7648,7 +7648,7 @@
           </a:bodyPr>
           <a:lstStyle xmlns:a="http://schemas.openxmlformats.org/drawingml/2006/main"/>
           <a:p xmlns:a="http://schemas.openxmlformats.org/drawingml/2006/main">
-            <a:pPr>
+            <a:pPr algn="l">
               <a:buNone/>
               <a:defRPr sz="1950" b="1">
                 <a:solidFill>
@@ -7668,7 +7668,7 @@
                 <a:ea typeface="DejaVu Sans"/>
                 <a:cs typeface="DejaVu Sans"/>
               </a:rPr>
-              <a:t/>
+              <a:t>3.</a:t>
             </a:r>
           </a:p>
         </p:txBody>
@@ -7706,7 +7706,7 @@
           </a:bodyPr>
           <a:lstStyle xmlns:a="http://schemas.openxmlformats.org/drawingml/2006/main"/>
           <a:p xmlns:a="http://schemas.openxmlformats.org/drawingml/2006/main">
-            <a:pPr>
+            <a:pPr algn="l">
               <a:buNone/>
               <a:defRPr sz="1950" b="0">
                 <a:solidFill>
@@ -7726,7 +7726,7 @@
                 <a:ea typeface="DejaVu Sans"/>
                 <a:cs typeface="DejaVu Sans"/>
               </a:rPr>
-              <a:t/>
+              <a:t>Compilation takes time before the program runs. After a source change, the program must be compiled again.</a:t>
             </a:r>
           </a:p>
         </p:txBody>
@@ -7915,7 +7915,7 @@
           <p:nvPr/>
         </p:nvPicPr>
         <p:blipFill>
-          <a:blip xmlns:r="http://schemas.openxmlformats.org/officeDocument/2006/relationships" xmlns:a="http://schemas.openxmlformats.org/drawingml/2006/main" r:embed="Ra22bdd39b1774d06"/>
+          <a:blip xmlns:r="http://schemas.openxmlformats.org/officeDocument/2006/relationships" xmlns:a="http://schemas.openxmlformats.org/drawingml/2006/main" r:embed="R07a1a26624754129"/>
           <a:stretch xmlns:a="http://schemas.openxmlformats.org/drawingml/2006/main"/>
         </p:blipFill>
         <p:spPr>
@@ -8692,7 +8692,7 @@
           <p:nvPr/>
         </p:nvPicPr>
         <p:blipFill>
-          <a:blip xmlns:r="http://schemas.openxmlformats.org/officeDocument/2006/relationships" xmlns:a="http://schemas.openxmlformats.org/drawingml/2006/main" r:embed="Raac18c1745134cf3"/>
+          <a:blip xmlns:r="http://schemas.openxmlformats.org/officeDocument/2006/relationships" xmlns:a="http://schemas.openxmlformats.org/drawingml/2006/main" r:embed="R3bedc21173a34d84"/>
           <a:stretch xmlns:a="http://schemas.openxmlformats.org/drawingml/2006/main"/>
         </p:blipFill>
         <p:spPr>
@@ -9411,7 +9411,7 @@
           <p:nvPr/>
         </p:nvPicPr>
         <p:blipFill>
-          <a:blip xmlns:r="http://schemas.openxmlformats.org/officeDocument/2006/relationships" xmlns:a="http://schemas.openxmlformats.org/drawingml/2006/main" r:embed="R83d6ffdb55de4406"/>
+          <a:blip xmlns:r="http://schemas.openxmlformats.org/officeDocument/2006/relationships" xmlns:a="http://schemas.openxmlformats.org/drawingml/2006/main" r:embed="R954d2602657e4011"/>
           <a:stretch xmlns:a="http://schemas.openxmlformats.org/drawingml/2006/main"/>
         </p:blipFill>
         <p:spPr>
@@ -9724,7 +9724,7 @@
           <p:nvPr/>
         </p:nvPicPr>
         <p:blipFill>
-          <a:blip xmlns:r="http://schemas.openxmlformats.org/officeDocument/2006/relationships" xmlns:a="http://schemas.openxmlformats.org/drawingml/2006/main" r:embed="R1de2d30f310944b1"/>
+          <a:blip xmlns:r="http://schemas.openxmlformats.org/officeDocument/2006/relationships" xmlns:a="http://schemas.openxmlformats.org/drawingml/2006/main" r:embed="Rfe6b21e4d571423e"/>
           <a:stretch xmlns:a="http://schemas.openxmlformats.org/drawingml/2006/main"/>
         </p:blipFill>
         <p:spPr>
@@ -10211,7 +10211,7 @@
           <p:nvPr/>
         </p:nvPicPr>
         <p:blipFill>
-          <a:blip xmlns:r="http://schemas.openxmlformats.org/officeDocument/2006/relationships" xmlns:a="http://schemas.openxmlformats.org/drawingml/2006/main" r:embed="Rfa11715015804c66"/>
+          <a:blip xmlns:r="http://schemas.openxmlformats.org/officeDocument/2006/relationships" xmlns:a="http://schemas.openxmlformats.org/drawingml/2006/main" r:embed="Rd04ebfbd2bb84355"/>
           <a:stretch xmlns:a="http://schemas.openxmlformats.org/drawingml/2006/main"/>
         </p:blipFill>
         <p:spPr>
@@ -10698,7 +10698,7 @@
           <p:nvPr/>
         </p:nvPicPr>
         <p:blipFill>
-          <a:blip xmlns:r="http://schemas.openxmlformats.org/officeDocument/2006/relationships" xmlns:a="http://schemas.openxmlformats.org/drawingml/2006/main" r:embed="Rb923604c24f64eec"/>
+          <a:blip xmlns:r="http://schemas.openxmlformats.org/officeDocument/2006/relationships" xmlns:a="http://schemas.openxmlformats.org/drawingml/2006/main" r:embed="R81b452384f644aff"/>
           <a:stretch xmlns:a="http://schemas.openxmlformats.org/drawingml/2006/main"/>
         </p:blipFill>
         <p:spPr>
@@ -11185,7 +11185,7 @@
           <p:nvPr/>
         </p:nvPicPr>
         <p:blipFill>
-          <a:blip xmlns:r="http://schemas.openxmlformats.org/officeDocument/2006/relationships" xmlns:a="http://schemas.openxmlformats.org/drawingml/2006/main" r:embed="Rc1188e95163d4351"/>
+          <a:blip xmlns:r="http://schemas.openxmlformats.org/officeDocument/2006/relationships" xmlns:a="http://schemas.openxmlformats.org/drawingml/2006/main" r:embed="R041624026b334200"/>
           <a:stretch xmlns:a="http://schemas.openxmlformats.org/drawingml/2006/main"/>
         </p:blipFill>
         <p:spPr>
@@ -11904,7 +11904,7 @@
           <p:nvPr/>
         </p:nvPicPr>
         <p:blipFill>
-          <a:blip xmlns:r="http://schemas.openxmlformats.org/officeDocument/2006/relationships" xmlns:a="http://schemas.openxmlformats.org/drawingml/2006/main" r:embed="R8aa2b594a0a74125"/>
+          <a:blip xmlns:r="http://schemas.openxmlformats.org/officeDocument/2006/relationships" xmlns:a="http://schemas.openxmlformats.org/drawingml/2006/main" r:embed="R94263f9c9901465b"/>
           <a:stretch xmlns:a="http://schemas.openxmlformats.org/drawingml/2006/main"/>
         </p:blipFill>
         <p:spPr>
@@ -12275,7 +12275,7 @@
           <p:nvPr/>
         </p:nvPicPr>
         <p:blipFill>
-          <a:blip xmlns:r="http://schemas.openxmlformats.org/officeDocument/2006/relationships" xmlns:a="http://schemas.openxmlformats.org/drawingml/2006/main" r:embed="R32db2f2281cf4681"/>
+          <a:blip xmlns:r="http://schemas.openxmlformats.org/officeDocument/2006/relationships" xmlns:a="http://schemas.openxmlformats.org/drawingml/2006/main" r:embed="Re798ea41260f4e81"/>
           <a:stretch xmlns:a="http://schemas.openxmlformats.org/drawingml/2006/main"/>
         </p:blipFill>
         <p:spPr>
